--- a/cs701/slides/week-13.pptx
+++ b/cs701/slides/week-13.pptx
@@ -18987,7 +18987,7 @@
                   <a:srgbClr val="01AEFD"/>
                 </a:solidFill>
               </a:rPr>
-              <a:t>Type this into Wordle.java   -   line 53</a:t>
+              <a:t>Type this into last week’s Wordle.java   -   line 53</a:t>
             </a:r>
           </a:p>
         </p:txBody>
